--- a/docs/答辩PPT.pptx
+++ b/docs/答辩PPT.pptx
@@ -5091,8 +5091,8 @@
         </p:blipFill>
         <p:spPr>
           <a:xfrm>
-            <a:off x="566928" y="1976893"/>
-            <a:ext cx="6858000" cy="3727174"/>
+            <a:off x="566928" y="1889116"/>
+            <a:ext cx="6858000" cy="3902727"/>
           </a:xfrm>
           <a:prstGeom prst="rect">
             <a:avLst/>
